--- a/docs/SSc_MIM_validation_endotypes.pptx
+++ b/docs/SSc_MIM_validation_endotypes.pptx
@@ -8563,7 +8563,7 @@
                 </a:solidFill>
                 <a:latin typeface="Calibri"/>
               </a:rPr>
-              <a:t>Four modules — M1 type-I IFN · M2 TGF-β/fibrosis · M3 EndoMT/vasculopathy · M4 IL-6/Th2/B — draining into 4 phenotype sinks.</a:t>
+              <a:t>Four modules — M1 type-I IFN · M2 TGF-β/fibrosis · M3 EndoMT/vasculopathy · M4 IL-6/Th2/B — draining into 6 phenotype endpoints.</a:t>
             </a:r>
           </a:p>
           <a:p>
@@ -10104,7 +10104,7 @@
                 </a:solidFill>
                 <a:latin typeface="Calibri"/>
               </a:rPr>
-              <a:t>4 phenotype sinks: myofibroblast · ECM · vascular remodelling · ISG signature.</a:t>
+              <a:t>6 endpoints: myofibroblast · ECM · vascular · IFN/ISG · autoantibodies (autoreactivity) · mRSS.</a:t>
             </a:r>
           </a:p>
           <a:p>
@@ -10123,7 +10123,7 @@
                 </a:solidFill>
                 <a:latin typeface="Calibri"/>
               </a:rPr>
-              <a:t>Rule: every entity reaches a sink in ≤6 steps (0 violations).</a:t>
+              <a:t>Rule: every entity reaches an endpoint in ≤6 steps (0 violations).</a:t>
             </a:r>
           </a:p>
         </p:txBody>

--- a/docs/SSc_MIM_validation_endotypes.pptx
+++ b/docs/SSc_MIM_validation_endotypes.pptx
@@ -21,6 +21,7 @@
     <p:sldId id="269" r:id="rId20"/>
     <p:sldId id="270" r:id="rId21"/>
     <p:sldId id="271" r:id="rId22"/>
+    <p:sldId id="272" r:id="rId23"/>
   </p:sldIdLst>
   <p:sldSz cx="12191695" cy="6858000" type="screen4x3"/>
   <p:notesSz cx="6858000" cy="9144000"/>
@@ -5222,7 +5223,7 @@
                 </a:solidFill>
                 <a:latin typeface="Calibri"/>
               </a:rPr>
-              <a:t>M1 84% · M2 88% · M3 75% · M4 71% — the curated biology is largely measurable.</a:t>
+              <a:t>M1 84% · M2 88% · M3 75% · M4 74% · M5 94% — the curated biology is largely measurable.</a:t>
             </a:r>
           </a:p>
           <a:p>
@@ -5500,7 +5501,7 @@
         <p:spPr>
           <a:xfrm>
             <a:off x="0" y="0"/>
-            <a:ext cx="12191695" cy="6858000"/>
+            <a:ext cx="12191695" cy="1078992"/>
           </a:xfrm>
           <a:prstGeom prst="rect">
             <a:avLst/>
@@ -5543,14 +5544,14 @@
         </p:nvSpPr>
         <p:spPr>
           <a:xfrm>
-            <a:off x="0" y="3246120"/>
-            <a:ext cx="12191695" cy="64008"/>
+            <a:off x="0" y="1078992"/>
+            <a:ext cx="12191695" cy="54864"/>
           </a:xfrm>
           <a:prstGeom prst="rect">
             <a:avLst/>
           </a:prstGeom>
           <a:solidFill>
-            <a:srgbClr val="E26D5A"/>
+            <a:srgbClr val="7E5A9E"/>
           </a:solidFill>
           <a:ln>
             <a:noFill/>
@@ -5587,8 +5588,8 @@
         </p:nvSpPr>
         <p:spPr>
           <a:xfrm>
-            <a:off x="822960" y="1828800"/>
-            <a:ext cx="10515600" cy="1280160"/>
+            <a:off x="548640" y="109728"/>
+            <a:ext cx="11155680" cy="914400"/>
           </a:xfrm>
           <a:prstGeom prst="rect">
             <a:avLst/>
@@ -5610,46 +5611,70 @@
               </a:spcAft>
             </a:pPr>
             <a:r>
-              <a:rPr sz="1600" b="1" i="0">
-                <a:solidFill>
-                  <a:srgbClr val="E26D5A"/>
-                </a:solidFill>
-                <a:latin typeface="Calibri"/>
-              </a:rPr>
-              <a:t>PART III</a:t>
-            </a:r>
-          </a:p>
-          <a:p>
-            <a:pPr algn="l">
-              <a:spcBef>
-                <a:spcPts val="400"/>
+              <a:rPr sz="1200" b="1" i="0">
+                <a:solidFill>
+                  <a:srgbClr val="7E5A9E"/>
+                </a:solidFill>
+                <a:latin typeface="Calibri"/>
+              </a:rPr>
+              <a:t>VALIDATION · MODULE M5</a:t>
+            </a:r>
+          </a:p>
+          <a:p>
+            <a:pPr algn="l">
+              <a:spcBef>
+                <a:spcPts val="100"/>
               </a:spcBef>
               <a:spcAft>
                 <a:spcPts val="600"/>
               </a:spcAft>
             </a:pPr>
             <a:r>
-              <a:rPr sz="4000" b="1" i="0">
+              <a:rPr sz="2500" b="1" i="0">
                 <a:solidFill>
                   <a:srgbClr val="FFFFFF"/>
                 </a:solidFill>
                 <a:latin typeface="Calibri"/>
               </a:rPr>
-              <a:t>Toward endotypes</a:t>
-            </a:r>
-          </a:p>
-        </p:txBody>
-      </p:sp>
-      <p:sp>
-        <p:nvSpPr>
-          <p:cNvPr id="6" name="TextBox 5"/>
+              <a:t>Validating a new module: B-cell / autoreactivity</a:t>
+            </a:r>
+          </a:p>
+        </p:txBody>
+      </p:sp>
+      <p:pic>
+        <p:nvPicPr>
+          <p:cNvPr id="6" name="Picture 5" descr="F7_M5_validation.png"/>
+          <p:cNvPicPr>
+            <a:picLocks noChangeAspect="1"/>
+          </p:cNvPicPr>
+          <p:nvPr/>
+        </p:nvPicPr>
+        <p:blipFill>
+          <a:blip r:embed="rId2"/>
+          <a:stretch>
+            <a:fillRect/>
+          </a:stretch>
+        </p:blipFill>
+        <p:spPr>
+          <a:xfrm>
+            <a:off x="457200" y="1371600"/>
+            <a:ext cx="7498079" cy="2598072"/>
+          </a:xfrm>
+          <a:prstGeom prst="rect">
+            <a:avLst/>
+          </a:prstGeom>
+        </p:spPr>
+      </p:pic>
+      <p:sp>
+        <p:nvSpPr>
+          <p:cNvPr id="7" name="TextBox 6"/>
           <p:cNvSpPr txBox="1"/>
           <p:nvPr/>
         </p:nvSpPr>
         <p:spPr>
           <a:xfrm>
-            <a:off x="822960" y="3474720"/>
-            <a:ext cx="10515600" cy="1280160"/>
+            <a:off x="8138160" y="1417320"/>
+            <a:ext cx="3611880" cy="4754880"/>
           </a:xfrm>
           <a:prstGeom prst="rect">
             <a:avLst/>
@@ -5671,13 +5696,192 @@
               </a:spcAft>
             </a:pPr>
             <a:r>
-              <a:rPr sz="1700" b="0" i="0">
-                <a:solidFill>
-                  <a:srgbClr val="CFDEE2"/>
-                </a:solidFill>
-                <a:latin typeface="Calibri"/>
-              </a:rPr>
-              <a:t>Using the validated map to characterise patient subgroups — mechanistically.</a:t>
+              <a:rPr sz="1280" b="0" i="0">
+                <a:solidFill>
+                  <a:srgbClr val="223038"/>
+                </a:solidFill>
+                <a:latin typeface="Calibri"/>
+              </a:rPr>
+              <a:t>The old M4 mixed cytokines with B-cell/autoreactivity → split into M4 (cytokine) + M5 (B-cell).</a:t>
+            </a:r>
+          </a:p>
+          <a:p>
+            <a:pPr algn="l">
+              <a:spcBef>
+                <a:spcPts val="0"/>
+              </a:spcBef>
+              <a:spcAft>
+                <a:spcPts val="600"/>
+              </a:spcAft>
+            </a:pPr>
+            <a:r>
+              <a:rPr sz="1280" b="1" i="0">
+                <a:solidFill>
+                  <a:srgbClr val="142C3A"/>
+                </a:solidFill>
+                <a:latin typeface="Calibri"/>
+              </a:rPr>
+              <a:t>Internal (skin scRNA-seq)</a:t>
+            </a:r>
+          </a:p>
+          <a:p>
+            <a:pPr algn="l">
+              <a:spcBef>
+                <a:spcPts val="0"/>
+              </a:spcBef>
+              <a:spcAft>
+                <a:spcPts val="600"/>
+              </a:spcAft>
+            </a:pPr>
+            <a:r>
+              <a:rPr sz="1280" b="0" i="0">
+                <a:solidFill>
+                  <a:srgbClr val="223038"/>
+                </a:solidFill>
+                <a:latin typeface="Calibri"/>
+              </a:rPr>
+              <a:t>Scored on the B/plasma compartment: M5 up in SSc (p=0.046), the only significant module → specific.</a:t>
+            </a:r>
+          </a:p>
+          <a:p>
+            <a:pPr algn="l">
+              <a:spcBef>
+                <a:spcPts val="0"/>
+              </a:spcBef>
+              <a:spcAft>
+                <a:spcPts val="600"/>
+              </a:spcAft>
+            </a:pPr>
+            <a:r>
+              <a:rPr sz="1280" b="1" i="0">
+                <a:solidFill>
+                  <a:srgbClr val="142C3A"/>
+                </a:solidFill>
+                <a:latin typeface="Calibri"/>
+              </a:rPr>
+              <a:t>External (GSE45536, blood)</a:t>
+            </a:r>
+          </a:p>
+          <a:p>
+            <a:pPr algn="l">
+              <a:spcBef>
+                <a:spcPts val="0"/>
+              </a:spcBef>
+              <a:spcAft>
+                <a:spcPts val="600"/>
+              </a:spcAft>
+            </a:pPr>
+            <a:r>
+              <a:rPr sz="1280" b="0" i="0">
+                <a:solidFill>
+                  <a:srgbClr val="223038"/>
+                </a:solidFill>
+                <a:latin typeface="Calibri"/>
+              </a:rPr>
+              <a:t>99 SSc / 24 HC: M5 separates groups (p=1.3e-4); autoantigens TOP1/CENPB ↑ (p=1.7e-10); circulating B abundance ↓.</a:t>
+            </a:r>
+          </a:p>
+          <a:p>
+            <a:pPr algn="l">
+              <a:spcBef>
+                <a:spcPts val="0"/>
+              </a:spcBef>
+              <a:spcAft>
+                <a:spcPts val="600"/>
+              </a:spcAft>
+            </a:pPr>
+            <a:r>
+              <a:rPr sz="1280" b="1" i="0">
+                <a:solidFill>
+                  <a:srgbClr val="142C3A"/>
+                </a:solidFill>
+                <a:latin typeface="Calibri"/>
+              </a:rPr>
+              <a:t>IFN control ↑ in SSc in both — method validated.</a:t>
+            </a:r>
+          </a:p>
+        </p:txBody>
+      </p:sp>
+      <p:sp>
+        <p:nvSpPr>
+          <p:cNvPr id="8" name="TextBox 7"/>
+          <p:cNvSpPr txBox="1"/>
+          <p:nvPr/>
+        </p:nvSpPr>
+        <p:spPr>
+          <a:xfrm>
+            <a:off x="548640" y="6437376"/>
+            <a:ext cx="8229600" cy="365760"/>
+          </a:xfrm>
+          <a:prstGeom prst="rect">
+            <a:avLst/>
+          </a:prstGeom>
+          <a:noFill/>
+        </p:spPr>
+        <p:txBody>
+          <a:bodyPr wrap="square">
+            <a:spAutoFit/>
+          </a:bodyPr>
+          <a:lstStyle/>
+          <a:p>
+            <a:pPr algn="l">
+              <a:spcBef>
+                <a:spcPts val="0"/>
+              </a:spcBef>
+              <a:spcAft>
+                <a:spcPts val="600"/>
+              </a:spcAft>
+            </a:pPr>
+            <a:r>
+              <a:rPr sz="900" b="0" i="0">
+                <a:solidFill>
+                  <a:srgbClr val="6B7A82"/>
+                </a:solidFill>
+                <a:latin typeface="Calibri"/>
+              </a:rPr>
+              <a:t>SSc-MIM · construction → validation → endotypes</a:t>
+            </a:r>
+          </a:p>
+        </p:txBody>
+      </p:sp>
+      <p:sp>
+        <p:nvSpPr>
+          <p:cNvPr id="9" name="TextBox 8"/>
+          <p:cNvSpPr txBox="1"/>
+          <p:nvPr/>
+        </p:nvSpPr>
+        <p:spPr>
+          <a:xfrm>
+            <a:off x="11247120" y="6437376"/>
+            <a:ext cx="731520" cy="365760"/>
+          </a:xfrm>
+          <a:prstGeom prst="rect">
+            <a:avLst/>
+          </a:prstGeom>
+          <a:noFill/>
+        </p:spPr>
+        <p:txBody>
+          <a:bodyPr wrap="square">
+            <a:spAutoFit/>
+          </a:bodyPr>
+          <a:lstStyle/>
+          <a:p>
+            <a:pPr algn="r">
+              <a:spcBef>
+                <a:spcPts val="0"/>
+              </a:spcBef>
+              <a:spcAft>
+                <a:spcPts val="600"/>
+              </a:spcAft>
+            </a:pPr>
+            <a:r>
+              <a:rPr sz="1000" b="0" i="0">
+                <a:solidFill>
+                  <a:srgbClr val="6B7A82"/>
+                </a:solidFill>
+                <a:latin typeface="Calibri"/>
+              </a:rPr>
+              <a:t>13</a:t>
             </a:r>
           </a:p>
         </p:txBody>
@@ -5753,7 +5957,7 @@
         <p:spPr>
           <a:xfrm>
             <a:off x="0" y="0"/>
-            <a:ext cx="12191695" cy="1078992"/>
+            <a:ext cx="12191695" cy="6858000"/>
           </a:xfrm>
           <a:prstGeom prst="rect">
             <a:avLst/>
@@ -5796,8 +6000,8 @@
         </p:nvSpPr>
         <p:spPr>
           <a:xfrm>
-            <a:off x="0" y="1078992"/>
-            <a:ext cx="12191695" cy="54864"/>
+            <a:off x="0" y="3246120"/>
+            <a:ext cx="12191695" cy="64008"/>
           </a:xfrm>
           <a:prstGeom prst="rect">
             <a:avLst/>
@@ -5840,8 +6044,8 @@
         </p:nvSpPr>
         <p:spPr>
           <a:xfrm>
-            <a:off x="548640" y="109728"/>
-            <a:ext cx="11155680" cy="914400"/>
+            <a:off x="822960" y="1828800"/>
+            <a:ext cx="10515600" cy="1280160"/>
           </a:xfrm>
           <a:prstGeom prst="rect">
             <a:avLst/>
@@ -5863,70 +6067,46 @@
               </a:spcAft>
             </a:pPr>
             <a:r>
-              <a:rPr sz="1200" b="1" i="0">
+              <a:rPr sz="1600" b="1" i="0">
                 <a:solidFill>
                   <a:srgbClr val="E26D5A"/>
                 </a:solidFill>
                 <a:latin typeface="Calibri"/>
               </a:rPr>
-              <a:t>ENDOTYPES</a:t>
-            </a:r>
-          </a:p>
-          <a:p>
-            <a:pPr algn="l">
-              <a:spcBef>
-                <a:spcPts val="100"/>
+              <a:t>PART III</a:t>
+            </a:r>
+          </a:p>
+          <a:p>
+            <a:pPr algn="l">
+              <a:spcBef>
+                <a:spcPts val="400"/>
               </a:spcBef>
               <a:spcAft>
                 <a:spcPts val="600"/>
               </a:spcAft>
             </a:pPr>
             <a:r>
-              <a:rPr sz="2500" b="1" i="0">
+              <a:rPr sz="4000" b="1" i="0">
                 <a:solidFill>
                   <a:srgbClr val="FFFFFF"/>
                 </a:solidFill>
                 <a:latin typeface="Calibri"/>
               </a:rPr>
-              <a:t>Patients already differ in module activation</a:t>
-            </a:r>
-          </a:p>
-        </p:txBody>
-      </p:sp>
-      <p:pic>
-        <p:nvPicPr>
-          <p:cNvPr id="6" name="Picture 5" descr="F6_endotype_profiles.png"/>
-          <p:cNvPicPr>
-            <a:picLocks noChangeAspect="1"/>
-          </p:cNvPicPr>
-          <p:nvPr/>
-        </p:nvPicPr>
-        <p:blipFill>
-          <a:blip r:embed="rId2"/>
-          <a:stretch>
-            <a:fillRect/>
-          </a:stretch>
-        </p:blipFill>
-        <p:spPr>
-          <a:xfrm>
-            <a:off x="502920" y="1371600"/>
-            <a:ext cx="7315200" cy="2612571"/>
-          </a:xfrm>
-          <a:prstGeom prst="rect">
-            <a:avLst/>
-          </a:prstGeom>
-        </p:spPr>
-      </p:pic>
-      <p:sp>
-        <p:nvSpPr>
-          <p:cNvPr id="7" name="TextBox 6"/>
+              <a:t>Toward endotypes</a:t>
+            </a:r>
+          </a:p>
+        </p:txBody>
+      </p:sp>
+      <p:sp>
+        <p:nvSpPr>
+          <p:cNvPr id="6" name="TextBox 5"/>
           <p:cNvSpPr txBox="1"/>
           <p:nvPr/>
         </p:nvSpPr>
         <p:spPr>
           <a:xfrm>
-            <a:off x="8001000" y="1463040"/>
-            <a:ext cx="3749039" cy="4754880"/>
+            <a:off x="822960" y="3474720"/>
+            <a:ext cx="10515600" cy="1280160"/>
           </a:xfrm>
           <a:prstGeom prst="rect">
             <a:avLst/>
@@ -5944,158 +6124,17 @@
                 <a:spcPts val="0"/>
               </a:spcBef>
               <a:spcAft>
-                <a:spcPts val="800"/>
-              </a:spcAft>
-            </a:pPr>
-            <a:r>
-              <a:rPr sz="1350" b="0" i="0">
-                <a:solidFill>
-                  <a:srgbClr val="223038"/>
-                </a:solidFill>
-                <a:latin typeface="Calibri"/>
-              </a:rPr>
-              <a:t>Each patient = a 4-module activation vector (Part II-B).</a:t>
-            </a:r>
-          </a:p>
-          <a:p>
-            <a:pPr algn="l">
-              <a:spcBef>
-                <a:spcPts val="0"/>
-              </a:spcBef>
-              <a:spcAft>
-                <a:spcPts val="800"/>
-              </a:spcAft>
-            </a:pPr>
-            <a:r>
-              <a:rPr sz="1350" b="0" i="0">
-                <a:solidFill>
-                  <a:srgbClr val="223038"/>
-                </a:solidFill>
-                <a:latin typeface="Calibri"/>
-              </a:rPr>
-              <a:t>IFN activation is not uniform: 40/109 SSc skin donors are IFN-high, others are not (reproducible Gur + Tabib).</a:t>
-            </a:r>
-          </a:p>
-          <a:p>
-            <a:pPr algn="l">
-              <a:spcBef>
-                <a:spcPts val="0"/>
-              </a:spcBef>
-              <a:spcAft>
-                <a:spcPts val="800"/>
-              </a:spcAft>
-            </a:pPr>
-            <a:r>
-              <a:rPr sz="1350" b="0" i="0">
-                <a:solidFill>
-                  <a:srgbClr val="223038"/>
-                </a:solidFill>
-                <a:latin typeface="Calibri"/>
-              </a:rPr>
-              <a:t>Distinct module profiles → candidate mechanism-matched endotypes (IFN-dominant vs fibrosis-dominant).</a:t>
-            </a:r>
-          </a:p>
-          <a:p>
-            <a:pPr algn="l">
-              <a:spcBef>
-                <a:spcPts val="0"/>
-              </a:spcBef>
-              <a:spcAft>
-                <a:spcPts val="800"/>
-              </a:spcAft>
-            </a:pPr>
-            <a:r>
-              <a:rPr sz="1350" b="0" i="0">
-                <a:solidFill>
-                  <a:srgbClr val="223038"/>
-                </a:solidFill>
-                <a:latin typeface="Calibri"/>
-              </a:rPr>
-              <a:t>Recapitulates the known SSc intrinsic subsets (inflammatory ↔ M1/M4, fibroproliferative ↔ M2).</a:t>
-            </a:r>
-          </a:p>
-        </p:txBody>
-      </p:sp>
-      <p:sp>
-        <p:nvSpPr>
-          <p:cNvPr id="8" name="TextBox 7"/>
-          <p:cNvSpPr txBox="1"/>
-          <p:nvPr/>
-        </p:nvSpPr>
-        <p:spPr>
-          <a:xfrm>
-            <a:off x="548640" y="6437376"/>
-            <a:ext cx="8229600" cy="365760"/>
-          </a:xfrm>
-          <a:prstGeom prst="rect">
-            <a:avLst/>
-          </a:prstGeom>
-          <a:noFill/>
-        </p:spPr>
-        <p:txBody>
-          <a:bodyPr wrap="square">
-            <a:spAutoFit/>
-          </a:bodyPr>
-          <a:lstStyle/>
-          <a:p>
-            <a:pPr algn="l">
-              <a:spcBef>
-                <a:spcPts val="0"/>
-              </a:spcBef>
-              <a:spcAft>
                 <a:spcPts val="600"/>
               </a:spcAft>
             </a:pPr>
             <a:r>
-              <a:rPr sz="900" b="0" i="0">
-                <a:solidFill>
-                  <a:srgbClr val="6B7A82"/>
-                </a:solidFill>
-                <a:latin typeface="Calibri"/>
-              </a:rPr>
-              <a:t>SSc-MIM · construction → validation → endotypes</a:t>
-            </a:r>
-          </a:p>
-        </p:txBody>
-      </p:sp>
-      <p:sp>
-        <p:nvSpPr>
-          <p:cNvPr id="9" name="TextBox 8"/>
-          <p:cNvSpPr txBox="1"/>
-          <p:nvPr/>
-        </p:nvSpPr>
-        <p:spPr>
-          <a:xfrm>
-            <a:off x="11247120" y="6437376"/>
-            <a:ext cx="731520" cy="365760"/>
-          </a:xfrm>
-          <a:prstGeom prst="rect">
-            <a:avLst/>
-          </a:prstGeom>
-          <a:noFill/>
-        </p:spPr>
-        <p:txBody>
-          <a:bodyPr wrap="square">
-            <a:spAutoFit/>
-          </a:bodyPr>
-          <a:lstStyle/>
-          <a:p>
-            <a:pPr algn="r">
-              <a:spcBef>
-                <a:spcPts val="0"/>
-              </a:spcBef>
-              <a:spcAft>
-                <a:spcPts val="600"/>
-              </a:spcAft>
-            </a:pPr>
-            <a:r>
-              <a:rPr sz="1000" b="0" i="0">
-                <a:solidFill>
-                  <a:srgbClr val="6B7A82"/>
-                </a:solidFill>
-                <a:latin typeface="Calibri"/>
-              </a:rPr>
-              <a:t>14</a:t>
+              <a:rPr sz="1700" b="0" i="0">
+                <a:solidFill>
+                  <a:srgbClr val="CFDEE2"/>
+                </a:solidFill>
+                <a:latin typeface="Calibri"/>
+              </a:rPr>
+              <a:t>Using the validated map to characterise patient subgroups — mechanistically.</a:t>
             </a:r>
           </a:p>
         </p:txBody>
@@ -6287,7 +6326,7 @@
                 </a:solidFill>
                 <a:latin typeface="Calibri"/>
               </a:rPr>
-              <a:t>USE CASE</a:t>
+              <a:t>ENDOTYPES</a:t>
             </a:r>
           </a:p>
           <a:p>
@@ -6306,21 +6345,45 @@
                 </a:solidFill>
                 <a:latin typeface="Calibri"/>
               </a:rPr>
-              <a:t>You arrive with 3 patient clusters — what the map gives you</a:t>
-            </a:r>
-          </a:p>
-        </p:txBody>
-      </p:sp>
-      <p:sp>
-        <p:nvSpPr>
-          <p:cNvPr id="6" name="TextBox 5"/>
+              <a:t>Patients already differ in module activation</a:t>
+            </a:r>
+          </a:p>
+        </p:txBody>
+      </p:sp>
+      <p:pic>
+        <p:nvPicPr>
+          <p:cNvPr id="6" name="Picture 5" descr="F6_endotype_profiles.png"/>
+          <p:cNvPicPr>
+            <a:picLocks noChangeAspect="1"/>
+          </p:cNvPicPr>
+          <p:nvPr/>
+        </p:nvPicPr>
+        <p:blipFill>
+          <a:blip r:embed="rId2"/>
+          <a:stretch>
+            <a:fillRect/>
+          </a:stretch>
+        </p:blipFill>
+        <p:spPr>
+          <a:xfrm>
+            <a:off x="502920" y="1371600"/>
+            <a:ext cx="7315200" cy="2612571"/>
+          </a:xfrm>
+          <a:prstGeom prst="rect">
+            <a:avLst/>
+          </a:prstGeom>
+        </p:spPr>
+      </p:pic>
+      <p:sp>
+        <p:nvSpPr>
+          <p:cNvPr id="7" name="TextBox 6"/>
           <p:cNvSpPr txBox="1"/>
           <p:nvPr/>
         </p:nvSpPr>
         <p:spPr>
           <a:xfrm>
-            <a:off x="548640" y="1298448"/>
-            <a:ext cx="11064240" cy="640080"/>
+            <a:off x="8001000" y="1463040"/>
+            <a:ext cx="3749039" cy="4754880"/>
           </a:xfrm>
           <a:prstGeom prst="rect">
             <a:avLst/>
@@ -6338,31 +6401,88 @@
                 <a:spcPts val="0"/>
               </a:spcBef>
               <a:spcAft>
-                <a:spcPts val="600"/>
-              </a:spcAft>
-            </a:pPr>
-            <a:r>
-              <a:rPr sz="1500" b="0" i="1">
+                <a:spcPts val="800"/>
+              </a:spcAft>
+            </a:pPr>
+            <a:r>
+              <a:rPr sz="1350" b="0" i="0">
                 <a:solidFill>
                   <a:srgbClr val="223038"/>
                 </a:solidFill>
                 <a:latin typeface="Calibri"/>
               </a:rPr>
-              <a:t>Project any patient grouping onto the map — same pipeline (AUCell + per-cluster DEG + MINERVA overlay), your labels.</a:t>
-            </a:r>
-          </a:p>
-        </p:txBody>
-      </p:sp>
-      <p:sp>
-        <p:nvSpPr>
-          <p:cNvPr id="7" name="TextBox 6"/>
+              <a:t>Each patient = a 4-module activation vector (Part II-B).</a:t>
+            </a:r>
+          </a:p>
+          <a:p>
+            <a:pPr algn="l">
+              <a:spcBef>
+                <a:spcPts val="0"/>
+              </a:spcBef>
+              <a:spcAft>
+                <a:spcPts val="800"/>
+              </a:spcAft>
+            </a:pPr>
+            <a:r>
+              <a:rPr sz="1350" b="0" i="0">
+                <a:solidFill>
+                  <a:srgbClr val="223038"/>
+                </a:solidFill>
+                <a:latin typeface="Calibri"/>
+              </a:rPr>
+              <a:t>IFN activation is not uniform: 40/109 SSc skin donors are IFN-high, others are not (reproducible Gur + Tabib).</a:t>
+            </a:r>
+          </a:p>
+          <a:p>
+            <a:pPr algn="l">
+              <a:spcBef>
+                <a:spcPts val="0"/>
+              </a:spcBef>
+              <a:spcAft>
+                <a:spcPts val="800"/>
+              </a:spcAft>
+            </a:pPr>
+            <a:r>
+              <a:rPr sz="1350" b="0" i="0">
+                <a:solidFill>
+                  <a:srgbClr val="223038"/>
+                </a:solidFill>
+                <a:latin typeface="Calibri"/>
+              </a:rPr>
+              <a:t>Distinct module profiles → candidate mechanism-matched endotypes (IFN-dominant vs fibrosis-dominant).</a:t>
+            </a:r>
+          </a:p>
+          <a:p>
+            <a:pPr algn="l">
+              <a:spcBef>
+                <a:spcPts val="0"/>
+              </a:spcBef>
+              <a:spcAft>
+                <a:spcPts val="800"/>
+              </a:spcAft>
+            </a:pPr>
+            <a:r>
+              <a:rPr sz="1350" b="0" i="0">
+                <a:solidFill>
+                  <a:srgbClr val="223038"/>
+                </a:solidFill>
+                <a:latin typeface="Calibri"/>
+              </a:rPr>
+              <a:t>Recapitulates the known SSc intrinsic subsets (inflammatory ↔ M1/M4, fibroproliferative ↔ M2).</a:t>
+            </a:r>
+          </a:p>
+        </p:txBody>
+      </p:sp>
+      <p:sp>
+        <p:nvSpPr>
+          <p:cNvPr id="8" name="TextBox 7"/>
           <p:cNvSpPr txBox="1"/>
           <p:nvPr/>
         </p:nvSpPr>
         <p:spPr>
           <a:xfrm>
-            <a:off x="548640" y="2057400"/>
-            <a:ext cx="2377440" cy="365760"/>
+            <a:off x="548640" y="6437376"/>
+            <a:ext cx="8229600" cy="365760"/>
           </a:xfrm>
           <a:prstGeom prst="rect">
             <a:avLst/>
@@ -6384,889 +6504,12 @@
               </a:spcAft>
             </a:pPr>
             <a:r>
-              <a:rPr sz="1100" b="1" i="0">
+              <a:rPr sz="900" b="0" i="0">
                 <a:solidFill>
                   <a:srgbClr val="6B7A82"/>
                 </a:solidFill>
                 <a:latin typeface="Calibri"/>
               </a:rPr>
-              <a:t>YOUR CLUSTERS</a:t>
-            </a:r>
-          </a:p>
-        </p:txBody>
-      </p:sp>
-      <p:sp>
-        <p:nvSpPr>
-          <p:cNvPr id="8" name="Rounded Rectangle 7"/>
-          <p:cNvSpPr/>
-          <p:nvPr/>
-        </p:nvSpPr>
-        <p:spPr>
-          <a:xfrm>
-            <a:off x="548640" y="2377440"/>
-            <a:ext cx="2240280" cy="512064"/>
-          </a:xfrm>
-          <a:prstGeom prst="roundRect">
-            <a:avLst/>
-          </a:prstGeom>
-          <a:solidFill>
-            <a:srgbClr val="3A73B8"/>
-          </a:solidFill>
-          <a:ln>
-            <a:noFill/>
-          </a:ln>
-          <a:effectLst/>
-        </p:spPr>
-        <p:style>
-          <a:lnRef idx="1">
-            <a:schemeClr val="accent1"/>
-          </a:lnRef>
-          <a:fillRef idx="3">
-            <a:schemeClr val="accent1"/>
-          </a:fillRef>
-          <a:effectRef idx="2">
-            <a:schemeClr val="accent1"/>
-          </a:effectRef>
-          <a:fontRef idx="minor">
-            <a:schemeClr val="lt1"/>
-          </a:fontRef>
-        </p:style>
-        <p:txBody>
-          <a:bodyPr rtlCol="0" anchor="ctr"/>
-          <a:lstStyle/>
-          <a:p>
-            <a:pPr algn="ctr">
-              <a:spcBef>
-                <a:spcPts val="0"/>
-              </a:spcBef>
-              <a:spcAft>
-                <a:spcPts val="600"/>
-              </a:spcAft>
-            </a:pPr>
-            <a:r>
-              <a:rPr sz="1500" b="1" i="0">
-                <a:solidFill>
-                  <a:srgbClr val="FFFFFF"/>
-                </a:solidFill>
-                <a:latin typeface="Calibri"/>
-              </a:rPr>
-              <a:t>Cluster 1</a:t>
-            </a:r>
-          </a:p>
-        </p:txBody>
-      </p:sp>
-      <p:sp>
-        <p:nvSpPr>
-          <p:cNvPr id="9" name="Rounded Rectangle 8"/>
-          <p:cNvSpPr/>
-          <p:nvPr/>
-        </p:nvSpPr>
-        <p:spPr>
-          <a:xfrm>
-            <a:off x="548640" y="2980944"/>
-            <a:ext cx="2240280" cy="512064"/>
-          </a:xfrm>
-          <a:prstGeom prst="roundRect">
-            <a:avLst/>
-          </a:prstGeom>
-          <a:solidFill>
-            <a:srgbClr val="3F9E8C"/>
-          </a:solidFill>
-          <a:ln>
-            <a:noFill/>
-          </a:ln>
-          <a:effectLst/>
-        </p:spPr>
-        <p:style>
-          <a:lnRef idx="1">
-            <a:schemeClr val="accent1"/>
-          </a:lnRef>
-          <a:fillRef idx="3">
-            <a:schemeClr val="accent1"/>
-          </a:fillRef>
-          <a:effectRef idx="2">
-            <a:schemeClr val="accent1"/>
-          </a:effectRef>
-          <a:fontRef idx="minor">
-            <a:schemeClr val="lt1"/>
-          </a:fontRef>
-        </p:style>
-        <p:txBody>
-          <a:bodyPr rtlCol="0" anchor="ctr"/>
-          <a:lstStyle/>
-          <a:p>
-            <a:pPr algn="ctr">
-              <a:spcBef>
-                <a:spcPts val="0"/>
-              </a:spcBef>
-              <a:spcAft>
-                <a:spcPts val="600"/>
-              </a:spcAft>
-            </a:pPr>
-            <a:r>
-              <a:rPr sz="1500" b="1" i="0">
-                <a:solidFill>
-                  <a:srgbClr val="FFFFFF"/>
-                </a:solidFill>
-                <a:latin typeface="Calibri"/>
-              </a:rPr>
-              <a:t>Cluster 2</a:t>
-            </a:r>
-          </a:p>
-        </p:txBody>
-      </p:sp>
-      <p:sp>
-        <p:nvSpPr>
-          <p:cNvPr id="10" name="Rounded Rectangle 9"/>
-          <p:cNvSpPr/>
-          <p:nvPr/>
-        </p:nvSpPr>
-        <p:spPr>
-          <a:xfrm>
-            <a:off x="548640" y="3584448"/>
-            <a:ext cx="2240280" cy="512064"/>
-          </a:xfrm>
-          <a:prstGeom prst="roundRect">
-            <a:avLst/>
-          </a:prstGeom>
-          <a:solidFill>
-            <a:srgbClr val="E26D5A"/>
-          </a:solidFill>
-          <a:ln>
-            <a:noFill/>
-          </a:ln>
-          <a:effectLst/>
-        </p:spPr>
-        <p:style>
-          <a:lnRef idx="1">
-            <a:schemeClr val="accent1"/>
-          </a:lnRef>
-          <a:fillRef idx="3">
-            <a:schemeClr val="accent1"/>
-          </a:fillRef>
-          <a:effectRef idx="2">
-            <a:schemeClr val="accent1"/>
-          </a:effectRef>
-          <a:fontRef idx="minor">
-            <a:schemeClr val="lt1"/>
-          </a:fontRef>
-        </p:style>
-        <p:txBody>
-          <a:bodyPr rtlCol="0" anchor="ctr"/>
-          <a:lstStyle/>
-          <a:p>
-            <a:pPr algn="ctr">
-              <a:spcBef>
-                <a:spcPts val="0"/>
-              </a:spcBef>
-              <a:spcAft>
-                <a:spcPts val="600"/>
-              </a:spcAft>
-            </a:pPr>
-            <a:r>
-              <a:rPr sz="1500" b="1" i="0">
-                <a:solidFill>
-                  <a:srgbClr val="FFFFFF"/>
-                </a:solidFill>
-                <a:latin typeface="Calibri"/>
-              </a:rPr>
-              <a:t>Cluster 3</a:t>
-            </a:r>
-          </a:p>
-        </p:txBody>
-      </p:sp>
-      <p:sp>
-        <p:nvSpPr>
-          <p:cNvPr id="11" name="TextBox 10"/>
-          <p:cNvSpPr txBox="1"/>
-          <p:nvPr/>
-        </p:nvSpPr>
-        <p:spPr>
-          <a:xfrm>
-            <a:off x="2834640" y="2971800"/>
-            <a:ext cx="640080" cy="640080"/>
-          </a:xfrm>
-          <a:prstGeom prst="rect">
-            <a:avLst/>
-          </a:prstGeom>
-          <a:noFill/>
-        </p:spPr>
-        <p:txBody>
-          <a:bodyPr wrap="square">
-            <a:spAutoFit/>
-          </a:bodyPr>
-          <a:lstStyle/>
-          <a:p>
-            <a:pPr algn="ctr">
-              <a:spcBef>
-                <a:spcPts val="0"/>
-              </a:spcBef>
-              <a:spcAft>
-                <a:spcPts val="600"/>
-              </a:spcAft>
-            </a:pPr>
-            <a:r>
-              <a:rPr sz="2600" b="1" i="0">
-                <a:solidFill>
-                  <a:srgbClr val="E26D5A"/>
-                </a:solidFill>
-                <a:latin typeface="Calibri"/>
-              </a:rPr>
-              <a:t>→</a:t>
-            </a:r>
-          </a:p>
-        </p:txBody>
-      </p:sp>
-      <p:sp>
-        <p:nvSpPr>
-          <p:cNvPr id="12" name="Rectangle 11"/>
-          <p:cNvSpPr/>
-          <p:nvPr/>
-        </p:nvSpPr>
-        <p:spPr>
-          <a:xfrm>
-            <a:off x="3520440" y="2331720"/>
-            <a:ext cx="8092440" cy="1783080"/>
-          </a:xfrm>
-          <a:prstGeom prst="rect">
-            <a:avLst/>
-          </a:prstGeom>
-          <a:solidFill>
-            <a:srgbClr val="142C3A"/>
-          </a:solidFill>
-          <a:ln>
-            <a:noFill/>
-          </a:ln>
-          <a:effectLst/>
-        </p:spPr>
-        <p:style>
-          <a:lnRef idx="1">
-            <a:schemeClr val="accent1"/>
-          </a:lnRef>
-          <a:fillRef idx="3">
-            <a:schemeClr val="accent1"/>
-          </a:fillRef>
-          <a:effectRef idx="2">
-            <a:schemeClr val="accent1"/>
-          </a:effectRef>
-          <a:fontRef idx="minor">
-            <a:schemeClr val="lt1"/>
-          </a:fontRef>
-        </p:style>
-        <p:txBody>
-          <a:bodyPr rtlCol="0" anchor="ctr"/>
-          <a:lstStyle/>
-          <a:p>
-            <a:pPr algn="ctr"/>
-          </a:p>
-        </p:txBody>
-      </p:sp>
-      <p:sp>
-        <p:nvSpPr>
-          <p:cNvPr id="13" name="TextBox 12"/>
-          <p:cNvSpPr txBox="1"/>
-          <p:nvPr/>
-        </p:nvSpPr>
-        <p:spPr>
-          <a:xfrm>
-            <a:off x="3794760" y="2487168"/>
-            <a:ext cx="7589520" cy="1554480"/>
-          </a:xfrm>
-          <a:prstGeom prst="rect">
-            <a:avLst/>
-          </a:prstGeom>
-          <a:noFill/>
-        </p:spPr>
-        <p:txBody>
-          <a:bodyPr wrap="square">
-            <a:spAutoFit/>
-          </a:bodyPr>
-          <a:lstStyle/>
-          <a:p>
-            <a:pPr algn="l">
-              <a:spcBef>
-                <a:spcPts val="0"/>
-              </a:spcBef>
-              <a:spcAft>
-                <a:spcPts val="400"/>
-              </a:spcAft>
-            </a:pPr>
-            <a:r>
-              <a:rPr sz="1250" b="0" i="0">
-                <a:solidFill>
-                  <a:srgbClr val="DDE7EA"/>
-                </a:solidFill>
-                <a:latin typeface="Calibri"/>
-              </a:rPr>
-              <a:t>AUCell — score each cluster on the 4 modules (M1/M2/M3/M4 + Tier-1).</a:t>
-            </a:r>
-          </a:p>
-          <a:p>
-            <a:pPr algn="l">
-              <a:spcBef>
-                <a:spcPts val="0"/>
-              </a:spcBef>
-              <a:spcAft>
-                <a:spcPts val="400"/>
-              </a:spcAft>
-            </a:pPr>
-            <a:r>
-              <a:rPr sz="1250" b="0" i="0">
-                <a:solidFill>
-                  <a:srgbClr val="DDE7EA"/>
-                </a:solidFill>
-                <a:latin typeface="Calibri"/>
-              </a:rPr>
-              <a:t>Per-cluster differential expression mapped onto map species → which reactions light up.</a:t>
-            </a:r>
-          </a:p>
-          <a:p>
-            <a:pPr algn="l">
-              <a:spcBef>
-                <a:spcPts val="0"/>
-              </a:spcBef>
-              <a:spcAft>
-                <a:spcPts val="400"/>
-              </a:spcAft>
-            </a:pPr>
-            <a:r>
-              <a:rPr sz="1250" b="0" i="0">
-                <a:solidFill>
-                  <a:srgbClr val="DDE7EA"/>
-                </a:solidFill>
-                <a:latin typeface="Calibri"/>
-              </a:rPr>
-              <a:t>MINERVA overlay — colour the map by each cluster (any label, no new method).</a:t>
-            </a:r>
-          </a:p>
-        </p:txBody>
-      </p:sp>
-      <p:sp>
-        <p:nvSpPr>
-          <p:cNvPr id="14" name="TextBox 13"/>
-          <p:cNvSpPr txBox="1"/>
-          <p:nvPr/>
-        </p:nvSpPr>
-        <p:spPr>
-          <a:xfrm>
-            <a:off x="548640" y="4343400"/>
-            <a:ext cx="11064240" cy="365760"/>
-          </a:xfrm>
-          <a:prstGeom prst="rect">
-            <a:avLst/>
-          </a:prstGeom>
-          <a:noFill/>
-        </p:spPr>
-        <p:txBody>
-          <a:bodyPr wrap="square">
-            <a:spAutoFit/>
-          </a:bodyPr>
-          <a:lstStyle/>
-          <a:p>
-            <a:pPr algn="l">
-              <a:spcBef>
-                <a:spcPts val="0"/>
-              </a:spcBef>
-              <a:spcAft>
-                <a:spcPts val="600"/>
-              </a:spcAft>
-            </a:pPr>
-            <a:r>
-              <a:rPr sz="1100" b="1" i="0">
-                <a:solidFill>
-                  <a:srgbClr val="6B7A82"/>
-                </a:solidFill>
-                <a:latin typeface="Calibri"/>
-              </a:rPr>
-              <a:t>WHAT YOU GET BACK — per cluster</a:t>
-            </a:r>
-          </a:p>
-        </p:txBody>
-      </p:sp>
-      <p:sp>
-        <p:nvSpPr>
-          <p:cNvPr id="15" name="Rectangle 14"/>
-          <p:cNvSpPr/>
-          <p:nvPr/>
-        </p:nvSpPr>
-        <p:spPr>
-          <a:xfrm>
-            <a:off x="548640" y="4709160"/>
-            <a:ext cx="3611880" cy="1371600"/>
-          </a:xfrm>
-          <a:prstGeom prst="rect">
-            <a:avLst/>
-          </a:prstGeom>
-          <a:solidFill>
-            <a:srgbClr val="FFFFFF"/>
-          </a:solidFill>
-          <a:ln>
-            <a:noFill/>
-          </a:ln>
-          <a:effectLst/>
-        </p:spPr>
-        <p:style>
-          <a:lnRef idx="1">
-            <a:schemeClr val="accent1"/>
-          </a:lnRef>
-          <a:fillRef idx="3">
-            <a:schemeClr val="accent1"/>
-          </a:fillRef>
-          <a:effectRef idx="2">
-            <a:schemeClr val="accent1"/>
-          </a:effectRef>
-          <a:fontRef idx="minor">
-            <a:schemeClr val="lt1"/>
-          </a:fontRef>
-        </p:style>
-        <p:txBody>
-          <a:bodyPr rtlCol="0" anchor="ctr"/>
-          <a:lstStyle/>
-          <a:p>
-            <a:pPr algn="ctr"/>
-          </a:p>
-        </p:txBody>
-      </p:sp>
-      <p:sp>
-        <p:nvSpPr>
-          <p:cNvPr id="16" name="Rectangle 15"/>
-          <p:cNvSpPr/>
-          <p:nvPr/>
-        </p:nvSpPr>
-        <p:spPr>
-          <a:xfrm>
-            <a:off x="548640" y="4709160"/>
-            <a:ext cx="3611880" cy="73152"/>
-          </a:xfrm>
-          <a:prstGeom prst="rect">
-            <a:avLst/>
-          </a:prstGeom>
-          <a:solidFill>
-            <a:srgbClr val="3A73B8"/>
-          </a:solidFill>
-          <a:ln>
-            <a:noFill/>
-          </a:ln>
-          <a:effectLst/>
-        </p:spPr>
-        <p:style>
-          <a:lnRef idx="1">
-            <a:schemeClr val="accent1"/>
-          </a:lnRef>
-          <a:fillRef idx="3">
-            <a:schemeClr val="accent1"/>
-          </a:fillRef>
-          <a:effectRef idx="2">
-            <a:schemeClr val="accent1"/>
-          </a:effectRef>
-          <a:fontRef idx="minor">
-            <a:schemeClr val="lt1"/>
-          </a:fontRef>
-        </p:style>
-        <p:txBody>
-          <a:bodyPr rtlCol="0" anchor="ctr"/>
-          <a:lstStyle/>
-          <a:p>
-            <a:pPr algn="ctr"/>
-          </a:p>
-        </p:txBody>
-      </p:sp>
-      <p:sp>
-        <p:nvSpPr>
-          <p:cNvPr id="17" name="TextBox 16"/>
-          <p:cNvSpPr txBox="1"/>
-          <p:nvPr/>
-        </p:nvSpPr>
-        <p:spPr>
-          <a:xfrm>
-            <a:off x="749808" y="4846320"/>
-            <a:ext cx="3246120" cy="1188720"/>
-          </a:xfrm>
-          <a:prstGeom prst="rect">
-            <a:avLst/>
-          </a:prstGeom>
-          <a:noFill/>
-        </p:spPr>
-        <p:txBody>
-          <a:bodyPr wrap="square">
-            <a:spAutoFit/>
-          </a:bodyPr>
-          <a:lstStyle/>
-          <a:p>
-            <a:pPr algn="l">
-              <a:spcBef>
-                <a:spcPts val="0"/>
-              </a:spcBef>
-              <a:spcAft>
-                <a:spcPts val="500"/>
-              </a:spcAft>
-            </a:pPr>
-            <a:r>
-              <a:rPr sz="1450" b="1" i="0">
-                <a:solidFill>
-                  <a:srgbClr val="3A73B8"/>
-                </a:solidFill>
-                <a:latin typeface="Calibri"/>
-              </a:rPr>
-              <a:t>Module fingerprint</a:t>
-            </a:r>
-          </a:p>
-          <a:p>
-            <a:pPr algn="l">
-              <a:spcBef>
-                <a:spcPts val="0"/>
-              </a:spcBef>
-              <a:spcAft>
-                <a:spcPts val="600"/>
-              </a:spcAft>
-            </a:pPr>
-            <a:r>
-              <a:rPr sz="1200" b="0" i="0">
-                <a:solidFill>
-                  <a:srgbClr val="223038"/>
-                </a:solidFill>
-                <a:latin typeface="Calibri"/>
-              </a:rPr>
-              <a:t>a 4-module activation vector — e.g. cluster 2 IFN-high, cluster 3 fibrosis-dominant.</a:t>
-            </a:r>
-          </a:p>
-        </p:txBody>
-      </p:sp>
-      <p:sp>
-        <p:nvSpPr>
-          <p:cNvPr id="18" name="Rectangle 17"/>
-          <p:cNvSpPr/>
-          <p:nvPr/>
-        </p:nvSpPr>
-        <p:spPr>
-          <a:xfrm>
-            <a:off x="4315968" y="4709160"/>
-            <a:ext cx="3611880" cy="1371600"/>
-          </a:xfrm>
-          <a:prstGeom prst="rect">
-            <a:avLst/>
-          </a:prstGeom>
-          <a:solidFill>
-            <a:srgbClr val="FFFFFF"/>
-          </a:solidFill>
-          <a:ln>
-            <a:noFill/>
-          </a:ln>
-          <a:effectLst/>
-        </p:spPr>
-        <p:style>
-          <a:lnRef idx="1">
-            <a:schemeClr val="accent1"/>
-          </a:lnRef>
-          <a:fillRef idx="3">
-            <a:schemeClr val="accent1"/>
-          </a:fillRef>
-          <a:effectRef idx="2">
-            <a:schemeClr val="accent1"/>
-          </a:effectRef>
-          <a:fontRef idx="minor">
-            <a:schemeClr val="lt1"/>
-          </a:fontRef>
-        </p:style>
-        <p:txBody>
-          <a:bodyPr rtlCol="0" anchor="ctr"/>
-          <a:lstStyle/>
-          <a:p>
-            <a:pPr algn="ctr"/>
-          </a:p>
-        </p:txBody>
-      </p:sp>
-      <p:sp>
-        <p:nvSpPr>
-          <p:cNvPr id="19" name="Rectangle 18"/>
-          <p:cNvSpPr/>
-          <p:nvPr/>
-        </p:nvSpPr>
-        <p:spPr>
-          <a:xfrm>
-            <a:off x="4315968" y="4709160"/>
-            <a:ext cx="3611880" cy="73152"/>
-          </a:xfrm>
-          <a:prstGeom prst="rect">
-            <a:avLst/>
-          </a:prstGeom>
-          <a:solidFill>
-            <a:srgbClr val="E26D5A"/>
-          </a:solidFill>
-          <a:ln>
-            <a:noFill/>
-          </a:ln>
-          <a:effectLst/>
-        </p:spPr>
-        <p:style>
-          <a:lnRef idx="1">
-            <a:schemeClr val="accent1"/>
-          </a:lnRef>
-          <a:fillRef idx="3">
-            <a:schemeClr val="accent1"/>
-          </a:fillRef>
-          <a:effectRef idx="2">
-            <a:schemeClr val="accent1"/>
-          </a:effectRef>
-          <a:fontRef idx="minor">
-            <a:schemeClr val="lt1"/>
-          </a:fontRef>
-        </p:style>
-        <p:txBody>
-          <a:bodyPr rtlCol="0" anchor="ctr"/>
-          <a:lstStyle/>
-          <a:p>
-            <a:pPr algn="ctr"/>
-          </a:p>
-        </p:txBody>
-      </p:sp>
-      <p:sp>
-        <p:nvSpPr>
-          <p:cNvPr id="20" name="TextBox 19"/>
-          <p:cNvSpPr txBox="1"/>
-          <p:nvPr/>
-        </p:nvSpPr>
-        <p:spPr>
-          <a:xfrm>
-            <a:off x="4517136" y="4846320"/>
-            <a:ext cx="3246120" cy="1188720"/>
-          </a:xfrm>
-          <a:prstGeom prst="rect">
-            <a:avLst/>
-          </a:prstGeom>
-          <a:noFill/>
-        </p:spPr>
-        <p:txBody>
-          <a:bodyPr wrap="square">
-            <a:spAutoFit/>
-          </a:bodyPr>
-          <a:lstStyle/>
-          <a:p>
-            <a:pPr algn="l">
-              <a:spcBef>
-                <a:spcPts val="0"/>
-              </a:spcBef>
-              <a:spcAft>
-                <a:spcPts val="500"/>
-              </a:spcAft>
-            </a:pPr>
-            <a:r>
-              <a:rPr sz="1450" b="1" i="0">
-                <a:solidFill>
-                  <a:srgbClr val="E26D5A"/>
-                </a:solidFill>
-                <a:latin typeface="Calibri"/>
-              </a:rPr>
-              <a:t>Mechanistic hypotheses</a:t>
-            </a:r>
-          </a:p>
-          <a:p>
-            <a:pPr algn="l">
-              <a:spcBef>
-                <a:spcPts val="0"/>
-              </a:spcBef>
-              <a:spcAft>
-                <a:spcPts val="600"/>
-              </a:spcAft>
-            </a:pPr>
-            <a:r>
-              <a:rPr sz="1200" b="0" i="0">
-                <a:solidFill>
-                  <a:srgbClr val="223038"/>
-                </a:solidFill>
-                <a:latin typeface="Calibri"/>
-              </a:rPr>
-              <a:t>the lit-up sub-circuits that distinguish each cluster — e.g. STING→IRF3 vs TGF-β→SMAD3→collagen.</a:t>
-            </a:r>
-          </a:p>
-        </p:txBody>
-      </p:sp>
-      <p:sp>
-        <p:nvSpPr>
-          <p:cNvPr id="21" name="Rectangle 20"/>
-          <p:cNvSpPr/>
-          <p:nvPr/>
-        </p:nvSpPr>
-        <p:spPr>
-          <a:xfrm>
-            <a:off x="8083296" y="4709160"/>
-            <a:ext cx="3611880" cy="1371600"/>
-          </a:xfrm>
-          <a:prstGeom prst="rect">
-            <a:avLst/>
-          </a:prstGeom>
-          <a:solidFill>
-            <a:srgbClr val="FFFFFF"/>
-          </a:solidFill>
-          <a:ln>
-            <a:noFill/>
-          </a:ln>
-          <a:effectLst/>
-        </p:spPr>
-        <p:style>
-          <a:lnRef idx="1">
-            <a:schemeClr val="accent1"/>
-          </a:lnRef>
-          <a:fillRef idx="3">
-            <a:schemeClr val="accent1"/>
-          </a:fillRef>
-          <a:effectRef idx="2">
-            <a:schemeClr val="accent1"/>
-          </a:effectRef>
-          <a:fontRef idx="minor">
-            <a:schemeClr val="lt1"/>
-          </a:fontRef>
-        </p:style>
-        <p:txBody>
-          <a:bodyPr rtlCol="0" anchor="ctr"/>
-          <a:lstStyle/>
-          <a:p>
-            <a:pPr algn="ctr"/>
-          </a:p>
-        </p:txBody>
-      </p:sp>
-      <p:sp>
-        <p:nvSpPr>
-          <p:cNvPr id="22" name="Rectangle 21"/>
-          <p:cNvSpPr/>
-          <p:nvPr/>
-        </p:nvSpPr>
-        <p:spPr>
-          <a:xfrm>
-            <a:off x="8083296" y="4709160"/>
-            <a:ext cx="3611880" cy="73152"/>
-          </a:xfrm>
-          <a:prstGeom prst="rect">
-            <a:avLst/>
-          </a:prstGeom>
-          <a:solidFill>
-            <a:srgbClr val="3F9E8C"/>
-          </a:solidFill>
-          <a:ln>
-            <a:noFill/>
-          </a:ln>
-          <a:effectLst/>
-        </p:spPr>
-        <p:style>
-          <a:lnRef idx="1">
-            <a:schemeClr val="accent1"/>
-          </a:lnRef>
-          <a:fillRef idx="3">
-            <a:schemeClr val="accent1"/>
-          </a:fillRef>
-          <a:effectRef idx="2">
-            <a:schemeClr val="accent1"/>
-          </a:effectRef>
-          <a:fontRef idx="minor">
-            <a:schemeClr val="lt1"/>
-          </a:fontRef>
-        </p:style>
-        <p:txBody>
-          <a:bodyPr rtlCol="0" anchor="ctr"/>
-          <a:lstStyle/>
-          <a:p>
-            <a:pPr algn="ctr"/>
-          </a:p>
-        </p:txBody>
-      </p:sp>
-      <p:sp>
-        <p:nvSpPr>
-          <p:cNvPr id="23" name="TextBox 22"/>
-          <p:cNvSpPr txBox="1"/>
-          <p:nvPr/>
-        </p:nvSpPr>
-        <p:spPr>
-          <a:xfrm>
-            <a:off x="8284464" y="4846320"/>
-            <a:ext cx="3246120" cy="1188720"/>
-          </a:xfrm>
-          <a:prstGeom prst="rect">
-            <a:avLst/>
-          </a:prstGeom>
-          <a:noFill/>
-        </p:spPr>
-        <p:txBody>
-          <a:bodyPr wrap="square">
-            <a:spAutoFit/>
-          </a:bodyPr>
-          <a:lstStyle/>
-          <a:p>
-            <a:pPr algn="l">
-              <a:spcBef>
-                <a:spcPts val="0"/>
-              </a:spcBef>
-              <a:spcAft>
-                <a:spcPts val="500"/>
-              </a:spcAft>
-            </a:pPr>
-            <a:r>
-              <a:rPr sz="1450" b="1" i="0">
-                <a:solidFill>
-                  <a:srgbClr val="3F9E8C"/>
-                </a:solidFill>
-                <a:latin typeface="Calibri"/>
-              </a:rPr>
-              <a:t>Candidate targets</a:t>
-            </a:r>
-          </a:p>
-          <a:p>
-            <a:pPr algn="l">
-              <a:spcBef>
-                <a:spcPts val="0"/>
-              </a:spcBef>
-              <a:spcAft>
-                <a:spcPts val="600"/>
-              </a:spcAft>
-            </a:pPr>
-            <a:r>
-              <a:rPr sz="1200" b="0" i="0">
-                <a:solidFill>
-                  <a:srgbClr val="223038"/>
-                </a:solidFill>
-                <a:latin typeface="Calibri"/>
-              </a:rPr>
-              <a:t>active druggable hubs per cluster → a cluster-matched therapy hypothesis to test.</a:t>
-            </a:r>
-          </a:p>
-        </p:txBody>
-      </p:sp>
-      <p:sp>
-        <p:nvSpPr>
-          <p:cNvPr id="24" name="TextBox 23"/>
-          <p:cNvSpPr txBox="1"/>
-          <p:nvPr/>
-        </p:nvSpPr>
-        <p:spPr>
-          <a:xfrm>
-            <a:off x="548640" y="6437376"/>
-            <a:ext cx="8229600" cy="365760"/>
-          </a:xfrm>
-          <a:prstGeom prst="rect">
-            <a:avLst/>
-          </a:prstGeom>
-          <a:noFill/>
-        </p:spPr>
-        <p:txBody>
-          <a:bodyPr wrap="square">
-            <a:spAutoFit/>
-          </a:bodyPr>
-          <a:lstStyle/>
-          <a:p>
-            <a:pPr algn="l">
-              <a:spcBef>
-                <a:spcPts val="0"/>
-              </a:spcBef>
-              <a:spcAft>
-                <a:spcPts val="600"/>
-              </a:spcAft>
-            </a:pPr>
-            <a:r>
-              <a:rPr sz="900" b="0" i="0">
-                <a:solidFill>
-                  <a:srgbClr val="6B7A82"/>
-                </a:solidFill>
-                <a:latin typeface="Calibri"/>
-              </a:rPr>
               <a:t>SSc-MIM · construction → validation → endotypes</a:t>
             </a:r>
           </a:p>
@@ -7274,7 +6517,7 @@
       </p:sp>
       <p:sp>
         <p:nvSpPr>
-          <p:cNvPr id="25" name="TextBox 24"/>
+          <p:cNvPr id="9" name="TextBox 8"/>
           <p:cNvSpPr txBox="1"/>
           <p:nvPr/>
         </p:nvSpPr>
@@ -7385,6 +6628,1220 @@
         <p:spPr>
           <a:xfrm>
             <a:off x="0" y="0"/>
+            <a:ext cx="12191695" cy="1078992"/>
+          </a:xfrm>
+          <a:prstGeom prst="rect">
+            <a:avLst/>
+          </a:prstGeom>
+          <a:solidFill>
+            <a:srgbClr val="142C3A"/>
+          </a:solidFill>
+          <a:ln>
+            <a:noFill/>
+          </a:ln>
+          <a:effectLst/>
+        </p:spPr>
+        <p:style>
+          <a:lnRef idx="1">
+            <a:schemeClr val="accent1"/>
+          </a:lnRef>
+          <a:fillRef idx="3">
+            <a:schemeClr val="accent1"/>
+          </a:fillRef>
+          <a:effectRef idx="2">
+            <a:schemeClr val="accent1"/>
+          </a:effectRef>
+          <a:fontRef idx="minor">
+            <a:schemeClr val="lt1"/>
+          </a:fontRef>
+        </p:style>
+        <p:txBody>
+          <a:bodyPr rtlCol="0" anchor="ctr"/>
+          <a:lstStyle/>
+          <a:p>
+            <a:pPr algn="ctr"/>
+          </a:p>
+        </p:txBody>
+      </p:sp>
+      <p:sp>
+        <p:nvSpPr>
+          <p:cNvPr id="4" name="Rectangle 3"/>
+          <p:cNvSpPr/>
+          <p:nvPr/>
+        </p:nvSpPr>
+        <p:spPr>
+          <a:xfrm>
+            <a:off x="0" y="1078992"/>
+            <a:ext cx="12191695" cy="54864"/>
+          </a:xfrm>
+          <a:prstGeom prst="rect">
+            <a:avLst/>
+          </a:prstGeom>
+          <a:solidFill>
+            <a:srgbClr val="E26D5A"/>
+          </a:solidFill>
+          <a:ln>
+            <a:noFill/>
+          </a:ln>
+          <a:effectLst/>
+        </p:spPr>
+        <p:style>
+          <a:lnRef idx="1">
+            <a:schemeClr val="accent1"/>
+          </a:lnRef>
+          <a:fillRef idx="3">
+            <a:schemeClr val="accent1"/>
+          </a:fillRef>
+          <a:effectRef idx="2">
+            <a:schemeClr val="accent1"/>
+          </a:effectRef>
+          <a:fontRef idx="minor">
+            <a:schemeClr val="lt1"/>
+          </a:fontRef>
+        </p:style>
+        <p:txBody>
+          <a:bodyPr rtlCol="0" anchor="ctr"/>
+          <a:lstStyle/>
+          <a:p>
+            <a:pPr algn="ctr"/>
+          </a:p>
+        </p:txBody>
+      </p:sp>
+      <p:sp>
+        <p:nvSpPr>
+          <p:cNvPr id="5" name="TextBox 4"/>
+          <p:cNvSpPr txBox="1"/>
+          <p:nvPr/>
+        </p:nvSpPr>
+        <p:spPr>
+          <a:xfrm>
+            <a:off x="548640" y="109728"/>
+            <a:ext cx="11155680" cy="914400"/>
+          </a:xfrm>
+          <a:prstGeom prst="rect">
+            <a:avLst/>
+          </a:prstGeom>
+          <a:noFill/>
+        </p:spPr>
+        <p:txBody>
+          <a:bodyPr wrap="square">
+            <a:spAutoFit/>
+          </a:bodyPr>
+          <a:lstStyle/>
+          <a:p>
+            <a:pPr algn="l">
+              <a:spcBef>
+                <a:spcPts val="0"/>
+              </a:spcBef>
+              <a:spcAft>
+                <a:spcPts val="600"/>
+              </a:spcAft>
+            </a:pPr>
+            <a:r>
+              <a:rPr sz="1200" b="1" i="0">
+                <a:solidFill>
+                  <a:srgbClr val="E26D5A"/>
+                </a:solidFill>
+                <a:latin typeface="Calibri"/>
+              </a:rPr>
+              <a:t>USE CASE</a:t>
+            </a:r>
+          </a:p>
+          <a:p>
+            <a:pPr algn="l">
+              <a:spcBef>
+                <a:spcPts val="100"/>
+              </a:spcBef>
+              <a:spcAft>
+                <a:spcPts val="600"/>
+              </a:spcAft>
+            </a:pPr>
+            <a:r>
+              <a:rPr sz="2500" b="1" i="0">
+                <a:solidFill>
+                  <a:srgbClr val="FFFFFF"/>
+                </a:solidFill>
+                <a:latin typeface="Calibri"/>
+              </a:rPr>
+              <a:t>You arrive with 3 patient clusters — what the map gives you</a:t>
+            </a:r>
+          </a:p>
+        </p:txBody>
+      </p:sp>
+      <p:sp>
+        <p:nvSpPr>
+          <p:cNvPr id="6" name="TextBox 5"/>
+          <p:cNvSpPr txBox="1"/>
+          <p:nvPr/>
+        </p:nvSpPr>
+        <p:spPr>
+          <a:xfrm>
+            <a:off x="548640" y="1298448"/>
+            <a:ext cx="11064240" cy="640080"/>
+          </a:xfrm>
+          <a:prstGeom prst="rect">
+            <a:avLst/>
+          </a:prstGeom>
+          <a:noFill/>
+        </p:spPr>
+        <p:txBody>
+          <a:bodyPr wrap="square">
+            <a:spAutoFit/>
+          </a:bodyPr>
+          <a:lstStyle/>
+          <a:p>
+            <a:pPr algn="l">
+              <a:spcBef>
+                <a:spcPts val="0"/>
+              </a:spcBef>
+              <a:spcAft>
+                <a:spcPts val="600"/>
+              </a:spcAft>
+            </a:pPr>
+            <a:r>
+              <a:rPr sz="1500" b="0" i="1">
+                <a:solidFill>
+                  <a:srgbClr val="223038"/>
+                </a:solidFill>
+                <a:latin typeface="Calibri"/>
+              </a:rPr>
+              <a:t>Project any patient grouping onto the map — same pipeline (AUCell + per-cluster DEG + MINERVA overlay), your labels.</a:t>
+            </a:r>
+          </a:p>
+        </p:txBody>
+      </p:sp>
+      <p:sp>
+        <p:nvSpPr>
+          <p:cNvPr id="7" name="TextBox 6"/>
+          <p:cNvSpPr txBox="1"/>
+          <p:nvPr/>
+        </p:nvSpPr>
+        <p:spPr>
+          <a:xfrm>
+            <a:off x="548640" y="2057400"/>
+            <a:ext cx="2377440" cy="365760"/>
+          </a:xfrm>
+          <a:prstGeom prst="rect">
+            <a:avLst/>
+          </a:prstGeom>
+          <a:noFill/>
+        </p:spPr>
+        <p:txBody>
+          <a:bodyPr wrap="square">
+            <a:spAutoFit/>
+          </a:bodyPr>
+          <a:lstStyle/>
+          <a:p>
+            <a:pPr algn="l">
+              <a:spcBef>
+                <a:spcPts val="0"/>
+              </a:spcBef>
+              <a:spcAft>
+                <a:spcPts val="600"/>
+              </a:spcAft>
+            </a:pPr>
+            <a:r>
+              <a:rPr sz="1100" b="1" i="0">
+                <a:solidFill>
+                  <a:srgbClr val="6B7A82"/>
+                </a:solidFill>
+                <a:latin typeface="Calibri"/>
+              </a:rPr>
+              <a:t>YOUR CLUSTERS</a:t>
+            </a:r>
+          </a:p>
+        </p:txBody>
+      </p:sp>
+      <p:sp>
+        <p:nvSpPr>
+          <p:cNvPr id="8" name="Rounded Rectangle 7"/>
+          <p:cNvSpPr/>
+          <p:nvPr/>
+        </p:nvSpPr>
+        <p:spPr>
+          <a:xfrm>
+            <a:off x="548640" y="2377440"/>
+            <a:ext cx="2240280" cy="512064"/>
+          </a:xfrm>
+          <a:prstGeom prst="roundRect">
+            <a:avLst/>
+          </a:prstGeom>
+          <a:solidFill>
+            <a:srgbClr val="3A73B8"/>
+          </a:solidFill>
+          <a:ln>
+            <a:noFill/>
+          </a:ln>
+          <a:effectLst/>
+        </p:spPr>
+        <p:style>
+          <a:lnRef idx="1">
+            <a:schemeClr val="accent1"/>
+          </a:lnRef>
+          <a:fillRef idx="3">
+            <a:schemeClr val="accent1"/>
+          </a:fillRef>
+          <a:effectRef idx="2">
+            <a:schemeClr val="accent1"/>
+          </a:effectRef>
+          <a:fontRef idx="minor">
+            <a:schemeClr val="lt1"/>
+          </a:fontRef>
+        </p:style>
+        <p:txBody>
+          <a:bodyPr rtlCol="0" anchor="ctr"/>
+          <a:lstStyle/>
+          <a:p>
+            <a:pPr algn="ctr">
+              <a:spcBef>
+                <a:spcPts val="0"/>
+              </a:spcBef>
+              <a:spcAft>
+                <a:spcPts val="600"/>
+              </a:spcAft>
+            </a:pPr>
+            <a:r>
+              <a:rPr sz="1500" b="1" i="0">
+                <a:solidFill>
+                  <a:srgbClr val="FFFFFF"/>
+                </a:solidFill>
+                <a:latin typeface="Calibri"/>
+              </a:rPr>
+              <a:t>Cluster 1</a:t>
+            </a:r>
+          </a:p>
+        </p:txBody>
+      </p:sp>
+      <p:sp>
+        <p:nvSpPr>
+          <p:cNvPr id="9" name="Rounded Rectangle 8"/>
+          <p:cNvSpPr/>
+          <p:nvPr/>
+        </p:nvSpPr>
+        <p:spPr>
+          <a:xfrm>
+            <a:off x="548640" y="2980944"/>
+            <a:ext cx="2240280" cy="512064"/>
+          </a:xfrm>
+          <a:prstGeom prst="roundRect">
+            <a:avLst/>
+          </a:prstGeom>
+          <a:solidFill>
+            <a:srgbClr val="3F9E8C"/>
+          </a:solidFill>
+          <a:ln>
+            <a:noFill/>
+          </a:ln>
+          <a:effectLst/>
+        </p:spPr>
+        <p:style>
+          <a:lnRef idx="1">
+            <a:schemeClr val="accent1"/>
+          </a:lnRef>
+          <a:fillRef idx="3">
+            <a:schemeClr val="accent1"/>
+          </a:fillRef>
+          <a:effectRef idx="2">
+            <a:schemeClr val="accent1"/>
+          </a:effectRef>
+          <a:fontRef idx="minor">
+            <a:schemeClr val="lt1"/>
+          </a:fontRef>
+        </p:style>
+        <p:txBody>
+          <a:bodyPr rtlCol="0" anchor="ctr"/>
+          <a:lstStyle/>
+          <a:p>
+            <a:pPr algn="ctr">
+              <a:spcBef>
+                <a:spcPts val="0"/>
+              </a:spcBef>
+              <a:spcAft>
+                <a:spcPts val="600"/>
+              </a:spcAft>
+            </a:pPr>
+            <a:r>
+              <a:rPr sz="1500" b="1" i="0">
+                <a:solidFill>
+                  <a:srgbClr val="FFFFFF"/>
+                </a:solidFill>
+                <a:latin typeface="Calibri"/>
+              </a:rPr>
+              <a:t>Cluster 2</a:t>
+            </a:r>
+          </a:p>
+        </p:txBody>
+      </p:sp>
+      <p:sp>
+        <p:nvSpPr>
+          <p:cNvPr id="10" name="Rounded Rectangle 9"/>
+          <p:cNvSpPr/>
+          <p:nvPr/>
+        </p:nvSpPr>
+        <p:spPr>
+          <a:xfrm>
+            <a:off x="548640" y="3584448"/>
+            <a:ext cx="2240280" cy="512064"/>
+          </a:xfrm>
+          <a:prstGeom prst="roundRect">
+            <a:avLst/>
+          </a:prstGeom>
+          <a:solidFill>
+            <a:srgbClr val="E26D5A"/>
+          </a:solidFill>
+          <a:ln>
+            <a:noFill/>
+          </a:ln>
+          <a:effectLst/>
+        </p:spPr>
+        <p:style>
+          <a:lnRef idx="1">
+            <a:schemeClr val="accent1"/>
+          </a:lnRef>
+          <a:fillRef idx="3">
+            <a:schemeClr val="accent1"/>
+          </a:fillRef>
+          <a:effectRef idx="2">
+            <a:schemeClr val="accent1"/>
+          </a:effectRef>
+          <a:fontRef idx="minor">
+            <a:schemeClr val="lt1"/>
+          </a:fontRef>
+        </p:style>
+        <p:txBody>
+          <a:bodyPr rtlCol="0" anchor="ctr"/>
+          <a:lstStyle/>
+          <a:p>
+            <a:pPr algn="ctr">
+              <a:spcBef>
+                <a:spcPts val="0"/>
+              </a:spcBef>
+              <a:spcAft>
+                <a:spcPts val="600"/>
+              </a:spcAft>
+            </a:pPr>
+            <a:r>
+              <a:rPr sz="1500" b="1" i="0">
+                <a:solidFill>
+                  <a:srgbClr val="FFFFFF"/>
+                </a:solidFill>
+                <a:latin typeface="Calibri"/>
+              </a:rPr>
+              <a:t>Cluster 3</a:t>
+            </a:r>
+          </a:p>
+        </p:txBody>
+      </p:sp>
+      <p:sp>
+        <p:nvSpPr>
+          <p:cNvPr id="11" name="TextBox 10"/>
+          <p:cNvSpPr txBox="1"/>
+          <p:nvPr/>
+        </p:nvSpPr>
+        <p:spPr>
+          <a:xfrm>
+            <a:off x="2834640" y="2971800"/>
+            <a:ext cx="640080" cy="640080"/>
+          </a:xfrm>
+          <a:prstGeom prst="rect">
+            <a:avLst/>
+          </a:prstGeom>
+          <a:noFill/>
+        </p:spPr>
+        <p:txBody>
+          <a:bodyPr wrap="square">
+            <a:spAutoFit/>
+          </a:bodyPr>
+          <a:lstStyle/>
+          <a:p>
+            <a:pPr algn="ctr">
+              <a:spcBef>
+                <a:spcPts val="0"/>
+              </a:spcBef>
+              <a:spcAft>
+                <a:spcPts val="600"/>
+              </a:spcAft>
+            </a:pPr>
+            <a:r>
+              <a:rPr sz="2600" b="1" i="0">
+                <a:solidFill>
+                  <a:srgbClr val="E26D5A"/>
+                </a:solidFill>
+                <a:latin typeface="Calibri"/>
+              </a:rPr>
+              <a:t>→</a:t>
+            </a:r>
+          </a:p>
+        </p:txBody>
+      </p:sp>
+      <p:sp>
+        <p:nvSpPr>
+          <p:cNvPr id="12" name="Rectangle 11"/>
+          <p:cNvSpPr/>
+          <p:nvPr/>
+        </p:nvSpPr>
+        <p:spPr>
+          <a:xfrm>
+            <a:off x="3520440" y="2331720"/>
+            <a:ext cx="8092440" cy="1783080"/>
+          </a:xfrm>
+          <a:prstGeom prst="rect">
+            <a:avLst/>
+          </a:prstGeom>
+          <a:solidFill>
+            <a:srgbClr val="142C3A"/>
+          </a:solidFill>
+          <a:ln>
+            <a:noFill/>
+          </a:ln>
+          <a:effectLst/>
+        </p:spPr>
+        <p:style>
+          <a:lnRef idx="1">
+            <a:schemeClr val="accent1"/>
+          </a:lnRef>
+          <a:fillRef idx="3">
+            <a:schemeClr val="accent1"/>
+          </a:fillRef>
+          <a:effectRef idx="2">
+            <a:schemeClr val="accent1"/>
+          </a:effectRef>
+          <a:fontRef idx="minor">
+            <a:schemeClr val="lt1"/>
+          </a:fontRef>
+        </p:style>
+        <p:txBody>
+          <a:bodyPr rtlCol="0" anchor="ctr"/>
+          <a:lstStyle/>
+          <a:p>
+            <a:pPr algn="ctr"/>
+          </a:p>
+        </p:txBody>
+      </p:sp>
+      <p:sp>
+        <p:nvSpPr>
+          <p:cNvPr id="13" name="TextBox 12"/>
+          <p:cNvSpPr txBox="1"/>
+          <p:nvPr/>
+        </p:nvSpPr>
+        <p:spPr>
+          <a:xfrm>
+            <a:off x="3794760" y="2487168"/>
+            <a:ext cx="7589520" cy="1554480"/>
+          </a:xfrm>
+          <a:prstGeom prst="rect">
+            <a:avLst/>
+          </a:prstGeom>
+          <a:noFill/>
+        </p:spPr>
+        <p:txBody>
+          <a:bodyPr wrap="square">
+            <a:spAutoFit/>
+          </a:bodyPr>
+          <a:lstStyle/>
+          <a:p>
+            <a:pPr algn="l">
+              <a:spcBef>
+                <a:spcPts val="0"/>
+              </a:spcBef>
+              <a:spcAft>
+                <a:spcPts val="400"/>
+              </a:spcAft>
+            </a:pPr>
+            <a:r>
+              <a:rPr sz="1250" b="0" i="0">
+                <a:solidFill>
+                  <a:srgbClr val="DDE7EA"/>
+                </a:solidFill>
+                <a:latin typeface="Calibri"/>
+              </a:rPr>
+              <a:t>AUCell — score each cluster on the 5 modules (M1–M5 + Tier-1).</a:t>
+            </a:r>
+          </a:p>
+          <a:p>
+            <a:pPr algn="l">
+              <a:spcBef>
+                <a:spcPts val="0"/>
+              </a:spcBef>
+              <a:spcAft>
+                <a:spcPts val="400"/>
+              </a:spcAft>
+            </a:pPr>
+            <a:r>
+              <a:rPr sz="1250" b="0" i="0">
+                <a:solidFill>
+                  <a:srgbClr val="DDE7EA"/>
+                </a:solidFill>
+                <a:latin typeface="Calibri"/>
+              </a:rPr>
+              <a:t>Per-cluster differential expression mapped onto map species → which reactions light up.</a:t>
+            </a:r>
+          </a:p>
+          <a:p>
+            <a:pPr algn="l">
+              <a:spcBef>
+                <a:spcPts val="0"/>
+              </a:spcBef>
+              <a:spcAft>
+                <a:spcPts val="400"/>
+              </a:spcAft>
+            </a:pPr>
+            <a:r>
+              <a:rPr sz="1250" b="0" i="0">
+                <a:solidFill>
+                  <a:srgbClr val="DDE7EA"/>
+                </a:solidFill>
+                <a:latin typeface="Calibri"/>
+              </a:rPr>
+              <a:t>MINERVA overlay — colour the map by each cluster (any label, no new method).</a:t>
+            </a:r>
+          </a:p>
+        </p:txBody>
+      </p:sp>
+      <p:sp>
+        <p:nvSpPr>
+          <p:cNvPr id="14" name="TextBox 13"/>
+          <p:cNvSpPr txBox="1"/>
+          <p:nvPr/>
+        </p:nvSpPr>
+        <p:spPr>
+          <a:xfrm>
+            <a:off x="548640" y="4343400"/>
+            <a:ext cx="11064240" cy="365760"/>
+          </a:xfrm>
+          <a:prstGeom prst="rect">
+            <a:avLst/>
+          </a:prstGeom>
+          <a:noFill/>
+        </p:spPr>
+        <p:txBody>
+          <a:bodyPr wrap="square">
+            <a:spAutoFit/>
+          </a:bodyPr>
+          <a:lstStyle/>
+          <a:p>
+            <a:pPr algn="l">
+              <a:spcBef>
+                <a:spcPts val="0"/>
+              </a:spcBef>
+              <a:spcAft>
+                <a:spcPts val="600"/>
+              </a:spcAft>
+            </a:pPr>
+            <a:r>
+              <a:rPr sz="1100" b="1" i="0">
+                <a:solidFill>
+                  <a:srgbClr val="6B7A82"/>
+                </a:solidFill>
+                <a:latin typeface="Calibri"/>
+              </a:rPr>
+              <a:t>WHAT YOU GET BACK — per cluster</a:t>
+            </a:r>
+          </a:p>
+        </p:txBody>
+      </p:sp>
+      <p:sp>
+        <p:nvSpPr>
+          <p:cNvPr id="15" name="Rectangle 14"/>
+          <p:cNvSpPr/>
+          <p:nvPr/>
+        </p:nvSpPr>
+        <p:spPr>
+          <a:xfrm>
+            <a:off x="548640" y="4709160"/>
+            <a:ext cx="3611880" cy="1371600"/>
+          </a:xfrm>
+          <a:prstGeom prst="rect">
+            <a:avLst/>
+          </a:prstGeom>
+          <a:solidFill>
+            <a:srgbClr val="FFFFFF"/>
+          </a:solidFill>
+          <a:ln>
+            <a:noFill/>
+          </a:ln>
+          <a:effectLst/>
+        </p:spPr>
+        <p:style>
+          <a:lnRef idx="1">
+            <a:schemeClr val="accent1"/>
+          </a:lnRef>
+          <a:fillRef idx="3">
+            <a:schemeClr val="accent1"/>
+          </a:fillRef>
+          <a:effectRef idx="2">
+            <a:schemeClr val="accent1"/>
+          </a:effectRef>
+          <a:fontRef idx="minor">
+            <a:schemeClr val="lt1"/>
+          </a:fontRef>
+        </p:style>
+        <p:txBody>
+          <a:bodyPr rtlCol="0" anchor="ctr"/>
+          <a:lstStyle/>
+          <a:p>
+            <a:pPr algn="ctr"/>
+          </a:p>
+        </p:txBody>
+      </p:sp>
+      <p:sp>
+        <p:nvSpPr>
+          <p:cNvPr id="16" name="Rectangle 15"/>
+          <p:cNvSpPr/>
+          <p:nvPr/>
+        </p:nvSpPr>
+        <p:spPr>
+          <a:xfrm>
+            <a:off x="548640" y="4709160"/>
+            <a:ext cx="3611880" cy="73152"/>
+          </a:xfrm>
+          <a:prstGeom prst="rect">
+            <a:avLst/>
+          </a:prstGeom>
+          <a:solidFill>
+            <a:srgbClr val="3A73B8"/>
+          </a:solidFill>
+          <a:ln>
+            <a:noFill/>
+          </a:ln>
+          <a:effectLst/>
+        </p:spPr>
+        <p:style>
+          <a:lnRef idx="1">
+            <a:schemeClr val="accent1"/>
+          </a:lnRef>
+          <a:fillRef idx="3">
+            <a:schemeClr val="accent1"/>
+          </a:fillRef>
+          <a:effectRef idx="2">
+            <a:schemeClr val="accent1"/>
+          </a:effectRef>
+          <a:fontRef idx="minor">
+            <a:schemeClr val="lt1"/>
+          </a:fontRef>
+        </p:style>
+        <p:txBody>
+          <a:bodyPr rtlCol="0" anchor="ctr"/>
+          <a:lstStyle/>
+          <a:p>
+            <a:pPr algn="ctr"/>
+          </a:p>
+        </p:txBody>
+      </p:sp>
+      <p:sp>
+        <p:nvSpPr>
+          <p:cNvPr id="17" name="TextBox 16"/>
+          <p:cNvSpPr txBox="1"/>
+          <p:nvPr/>
+        </p:nvSpPr>
+        <p:spPr>
+          <a:xfrm>
+            <a:off x="749808" y="4846320"/>
+            <a:ext cx="3246120" cy="1188720"/>
+          </a:xfrm>
+          <a:prstGeom prst="rect">
+            <a:avLst/>
+          </a:prstGeom>
+          <a:noFill/>
+        </p:spPr>
+        <p:txBody>
+          <a:bodyPr wrap="square">
+            <a:spAutoFit/>
+          </a:bodyPr>
+          <a:lstStyle/>
+          <a:p>
+            <a:pPr algn="l">
+              <a:spcBef>
+                <a:spcPts val="0"/>
+              </a:spcBef>
+              <a:spcAft>
+                <a:spcPts val="500"/>
+              </a:spcAft>
+            </a:pPr>
+            <a:r>
+              <a:rPr sz="1450" b="1" i="0">
+                <a:solidFill>
+                  <a:srgbClr val="3A73B8"/>
+                </a:solidFill>
+                <a:latin typeface="Calibri"/>
+              </a:rPr>
+              <a:t>Module fingerprint</a:t>
+            </a:r>
+          </a:p>
+          <a:p>
+            <a:pPr algn="l">
+              <a:spcBef>
+                <a:spcPts val="0"/>
+              </a:spcBef>
+              <a:spcAft>
+                <a:spcPts val="600"/>
+              </a:spcAft>
+            </a:pPr>
+            <a:r>
+              <a:rPr sz="1200" b="0" i="0">
+                <a:solidFill>
+                  <a:srgbClr val="223038"/>
+                </a:solidFill>
+                <a:latin typeface="Calibri"/>
+              </a:rPr>
+              <a:t>a 4-module activation vector — e.g. cluster 2 IFN-high, cluster 3 fibrosis-dominant.</a:t>
+            </a:r>
+          </a:p>
+        </p:txBody>
+      </p:sp>
+      <p:sp>
+        <p:nvSpPr>
+          <p:cNvPr id="18" name="Rectangle 17"/>
+          <p:cNvSpPr/>
+          <p:nvPr/>
+        </p:nvSpPr>
+        <p:spPr>
+          <a:xfrm>
+            <a:off x="4315968" y="4709160"/>
+            <a:ext cx="3611880" cy="1371600"/>
+          </a:xfrm>
+          <a:prstGeom prst="rect">
+            <a:avLst/>
+          </a:prstGeom>
+          <a:solidFill>
+            <a:srgbClr val="FFFFFF"/>
+          </a:solidFill>
+          <a:ln>
+            <a:noFill/>
+          </a:ln>
+          <a:effectLst/>
+        </p:spPr>
+        <p:style>
+          <a:lnRef idx="1">
+            <a:schemeClr val="accent1"/>
+          </a:lnRef>
+          <a:fillRef idx="3">
+            <a:schemeClr val="accent1"/>
+          </a:fillRef>
+          <a:effectRef idx="2">
+            <a:schemeClr val="accent1"/>
+          </a:effectRef>
+          <a:fontRef idx="minor">
+            <a:schemeClr val="lt1"/>
+          </a:fontRef>
+        </p:style>
+        <p:txBody>
+          <a:bodyPr rtlCol="0" anchor="ctr"/>
+          <a:lstStyle/>
+          <a:p>
+            <a:pPr algn="ctr"/>
+          </a:p>
+        </p:txBody>
+      </p:sp>
+      <p:sp>
+        <p:nvSpPr>
+          <p:cNvPr id="19" name="Rectangle 18"/>
+          <p:cNvSpPr/>
+          <p:nvPr/>
+        </p:nvSpPr>
+        <p:spPr>
+          <a:xfrm>
+            <a:off x="4315968" y="4709160"/>
+            <a:ext cx="3611880" cy="73152"/>
+          </a:xfrm>
+          <a:prstGeom prst="rect">
+            <a:avLst/>
+          </a:prstGeom>
+          <a:solidFill>
+            <a:srgbClr val="E26D5A"/>
+          </a:solidFill>
+          <a:ln>
+            <a:noFill/>
+          </a:ln>
+          <a:effectLst/>
+        </p:spPr>
+        <p:style>
+          <a:lnRef idx="1">
+            <a:schemeClr val="accent1"/>
+          </a:lnRef>
+          <a:fillRef idx="3">
+            <a:schemeClr val="accent1"/>
+          </a:fillRef>
+          <a:effectRef idx="2">
+            <a:schemeClr val="accent1"/>
+          </a:effectRef>
+          <a:fontRef idx="minor">
+            <a:schemeClr val="lt1"/>
+          </a:fontRef>
+        </p:style>
+        <p:txBody>
+          <a:bodyPr rtlCol="0" anchor="ctr"/>
+          <a:lstStyle/>
+          <a:p>
+            <a:pPr algn="ctr"/>
+          </a:p>
+        </p:txBody>
+      </p:sp>
+      <p:sp>
+        <p:nvSpPr>
+          <p:cNvPr id="20" name="TextBox 19"/>
+          <p:cNvSpPr txBox="1"/>
+          <p:nvPr/>
+        </p:nvSpPr>
+        <p:spPr>
+          <a:xfrm>
+            <a:off x="4517136" y="4846320"/>
+            <a:ext cx="3246120" cy="1188720"/>
+          </a:xfrm>
+          <a:prstGeom prst="rect">
+            <a:avLst/>
+          </a:prstGeom>
+          <a:noFill/>
+        </p:spPr>
+        <p:txBody>
+          <a:bodyPr wrap="square">
+            <a:spAutoFit/>
+          </a:bodyPr>
+          <a:lstStyle/>
+          <a:p>
+            <a:pPr algn="l">
+              <a:spcBef>
+                <a:spcPts val="0"/>
+              </a:spcBef>
+              <a:spcAft>
+                <a:spcPts val="500"/>
+              </a:spcAft>
+            </a:pPr>
+            <a:r>
+              <a:rPr sz="1450" b="1" i="0">
+                <a:solidFill>
+                  <a:srgbClr val="E26D5A"/>
+                </a:solidFill>
+                <a:latin typeface="Calibri"/>
+              </a:rPr>
+              <a:t>Mechanistic hypotheses</a:t>
+            </a:r>
+          </a:p>
+          <a:p>
+            <a:pPr algn="l">
+              <a:spcBef>
+                <a:spcPts val="0"/>
+              </a:spcBef>
+              <a:spcAft>
+                <a:spcPts val="600"/>
+              </a:spcAft>
+            </a:pPr>
+            <a:r>
+              <a:rPr sz="1200" b="0" i="0">
+                <a:solidFill>
+                  <a:srgbClr val="223038"/>
+                </a:solidFill>
+                <a:latin typeface="Calibri"/>
+              </a:rPr>
+              <a:t>the lit-up sub-circuits that distinguish each cluster — e.g. STING→IRF3 vs TGF-β→SMAD3→collagen.</a:t>
+            </a:r>
+          </a:p>
+        </p:txBody>
+      </p:sp>
+      <p:sp>
+        <p:nvSpPr>
+          <p:cNvPr id="21" name="Rectangle 20"/>
+          <p:cNvSpPr/>
+          <p:nvPr/>
+        </p:nvSpPr>
+        <p:spPr>
+          <a:xfrm>
+            <a:off x="8083296" y="4709160"/>
+            <a:ext cx="3611880" cy="1371600"/>
+          </a:xfrm>
+          <a:prstGeom prst="rect">
+            <a:avLst/>
+          </a:prstGeom>
+          <a:solidFill>
+            <a:srgbClr val="FFFFFF"/>
+          </a:solidFill>
+          <a:ln>
+            <a:noFill/>
+          </a:ln>
+          <a:effectLst/>
+        </p:spPr>
+        <p:style>
+          <a:lnRef idx="1">
+            <a:schemeClr val="accent1"/>
+          </a:lnRef>
+          <a:fillRef idx="3">
+            <a:schemeClr val="accent1"/>
+          </a:fillRef>
+          <a:effectRef idx="2">
+            <a:schemeClr val="accent1"/>
+          </a:effectRef>
+          <a:fontRef idx="minor">
+            <a:schemeClr val="lt1"/>
+          </a:fontRef>
+        </p:style>
+        <p:txBody>
+          <a:bodyPr rtlCol="0" anchor="ctr"/>
+          <a:lstStyle/>
+          <a:p>
+            <a:pPr algn="ctr"/>
+          </a:p>
+        </p:txBody>
+      </p:sp>
+      <p:sp>
+        <p:nvSpPr>
+          <p:cNvPr id="22" name="Rectangle 21"/>
+          <p:cNvSpPr/>
+          <p:nvPr/>
+        </p:nvSpPr>
+        <p:spPr>
+          <a:xfrm>
+            <a:off x="8083296" y="4709160"/>
+            <a:ext cx="3611880" cy="73152"/>
+          </a:xfrm>
+          <a:prstGeom prst="rect">
+            <a:avLst/>
+          </a:prstGeom>
+          <a:solidFill>
+            <a:srgbClr val="3F9E8C"/>
+          </a:solidFill>
+          <a:ln>
+            <a:noFill/>
+          </a:ln>
+          <a:effectLst/>
+        </p:spPr>
+        <p:style>
+          <a:lnRef idx="1">
+            <a:schemeClr val="accent1"/>
+          </a:lnRef>
+          <a:fillRef idx="3">
+            <a:schemeClr val="accent1"/>
+          </a:fillRef>
+          <a:effectRef idx="2">
+            <a:schemeClr val="accent1"/>
+          </a:effectRef>
+          <a:fontRef idx="minor">
+            <a:schemeClr val="lt1"/>
+          </a:fontRef>
+        </p:style>
+        <p:txBody>
+          <a:bodyPr rtlCol="0" anchor="ctr"/>
+          <a:lstStyle/>
+          <a:p>
+            <a:pPr algn="ctr"/>
+          </a:p>
+        </p:txBody>
+      </p:sp>
+      <p:sp>
+        <p:nvSpPr>
+          <p:cNvPr id="23" name="TextBox 22"/>
+          <p:cNvSpPr txBox="1"/>
+          <p:nvPr/>
+        </p:nvSpPr>
+        <p:spPr>
+          <a:xfrm>
+            <a:off x="8284464" y="4846320"/>
+            <a:ext cx="3246120" cy="1188720"/>
+          </a:xfrm>
+          <a:prstGeom prst="rect">
+            <a:avLst/>
+          </a:prstGeom>
+          <a:noFill/>
+        </p:spPr>
+        <p:txBody>
+          <a:bodyPr wrap="square">
+            <a:spAutoFit/>
+          </a:bodyPr>
+          <a:lstStyle/>
+          <a:p>
+            <a:pPr algn="l">
+              <a:spcBef>
+                <a:spcPts val="0"/>
+              </a:spcBef>
+              <a:spcAft>
+                <a:spcPts val="500"/>
+              </a:spcAft>
+            </a:pPr>
+            <a:r>
+              <a:rPr sz="1450" b="1" i="0">
+                <a:solidFill>
+                  <a:srgbClr val="3F9E8C"/>
+                </a:solidFill>
+                <a:latin typeface="Calibri"/>
+              </a:rPr>
+              <a:t>Candidate targets</a:t>
+            </a:r>
+          </a:p>
+          <a:p>
+            <a:pPr algn="l">
+              <a:spcBef>
+                <a:spcPts val="0"/>
+              </a:spcBef>
+              <a:spcAft>
+                <a:spcPts val="600"/>
+              </a:spcAft>
+            </a:pPr>
+            <a:r>
+              <a:rPr sz="1200" b="0" i="0">
+                <a:solidFill>
+                  <a:srgbClr val="223038"/>
+                </a:solidFill>
+                <a:latin typeface="Calibri"/>
+              </a:rPr>
+              <a:t>active druggable hubs per cluster → a cluster-matched therapy hypothesis to test.</a:t>
+            </a:r>
+          </a:p>
+        </p:txBody>
+      </p:sp>
+      <p:sp>
+        <p:nvSpPr>
+          <p:cNvPr id="24" name="TextBox 23"/>
+          <p:cNvSpPr txBox="1"/>
+          <p:nvPr/>
+        </p:nvSpPr>
+        <p:spPr>
+          <a:xfrm>
+            <a:off x="548640" y="6437376"/>
+            <a:ext cx="8229600" cy="365760"/>
+          </a:xfrm>
+          <a:prstGeom prst="rect">
+            <a:avLst/>
+          </a:prstGeom>
+          <a:noFill/>
+        </p:spPr>
+        <p:txBody>
+          <a:bodyPr wrap="square">
+            <a:spAutoFit/>
+          </a:bodyPr>
+          <a:lstStyle/>
+          <a:p>
+            <a:pPr algn="l">
+              <a:spcBef>
+                <a:spcPts val="0"/>
+              </a:spcBef>
+              <a:spcAft>
+                <a:spcPts val="600"/>
+              </a:spcAft>
+            </a:pPr>
+            <a:r>
+              <a:rPr sz="900" b="0" i="0">
+                <a:solidFill>
+                  <a:srgbClr val="6B7A82"/>
+                </a:solidFill>
+                <a:latin typeface="Calibri"/>
+              </a:rPr>
+              <a:t>SSc-MIM · construction → validation → endotypes</a:t>
+            </a:r>
+          </a:p>
+        </p:txBody>
+      </p:sp>
+      <p:sp>
+        <p:nvSpPr>
+          <p:cNvPr id="25" name="TextBox 24"/>
+          <p:cNvSpPr txBox="1"/>
+          <p:nvPr/>
+        </p:nvSpPr>
+        <p:spPr>
+          <a:xfrm>
+            <a:off x="11247120" y="6437376"/>
+            <a:ext cx="731520" cy="365760"/>
+          </a:xfrm>
+          <a:prstGeom prst="rect">
+            <a:avLst/>
+          </a:prstGeom>
+          <a:noFill/>
+        </p:spPr>
+        <p:txBody>
+          <a:bodyPr wrap="square">
+            <a:spAutoFit/>
+          </a:bodyPr>
+          <a:lstStyle/>
+          <a:p>
+            <a:pPr algn="r">
+              <a:spcBef>
+                <a:spcPts val="0"/>
+              </a:spcBef>
+              <a:spcAft>
+                <a:spcPts val="600"/>
+              </a:spcAft>
+            </a:pPr>
+            <a:r>
+              <a:rPr sz="1000" b="0" i="0">
+                <a:solidFill>
+                  <a:srgbClr val="6B7A82"/>
+                </a:solidFill>
+                <a:latin typeface="Calibri"/>
+              </a:rPr>
+              <a:t>16</a:t>
+            </a:r>
+          </a:p>
+        </p:txBody>
+      </p:sp>
+    </p:spTree>
+  </p:cSld>
+  <p:clrMapOvr>
+    <a:masterClrMapping/>
+  </p:clrMapOvr>
+</p:sld>
+</file>
+
+<file path=ppt/slides/slide17.xml><?xml version="1.0" encoding="utf-8"?>
+<p:sld xmlns:a="http://schemas.openxmlformats.org/drawingml/2006/main" xmlns:p="http://schemas.openxmlformats.org/presentationml/2006/main" xmlns:r="http://schemas.openxmlformats.org/officeDocument/2006/relationships">
+  <p:cSld>
+    <p:spTree>
+      <p:nvGrpSpPr>
+        <p:cNvPr id="1" name=""/>
+        <p:cNvGrpSpPr/>
+        <p:nvPr/>
+      </p:nvGrpSpPr>
+      <p:grpSpPr/>
+      <p:sp>
+        <p:nvSpPr>
+          <p:cNvPr id="2" name="Rectangle 1"/>
+          <p:cNvSpPr/>
+          <p:nvPr/>
+        </p:nvSpPr>
+        <p:spPr>
+          <a:xfrm>
+            <a:off x="0" y="0"/>
+            <a:ext cx="12191695" cy="6858000"/>
+          </a:xfrm>
+          <a:prstGeom prst="rect">
+            <a:avLst/>
+          </a:prstGeom>
+          <a:solidFill>
+            <a:srgbClr val="F6F4F0"/>
+          </a:solidFill>
+          <a:ln>
+            <a:noFill/>
+          </a:ln>
+          <a:effectLst/>
+        </p:spPr>
+        <p:style>
+          <a:lnRef idx="1">
+            <a:schemeClr val="accent1"/>
+          </a:lnRef>
+          <a:fillRef idx="3">
+            <a:schemeClr val="accent1"/>
+          </a:fillRef>
+          <a:effectRef idx="2">
+            <a:schemeClr val="accent1"/>
+          </a:effectRef>
+          <a:fontRef idx="minor">
+            <a:schemeClr val="lt1"/>
+          </a:fontRef>
+        </p:style>
+        <p:txBody>
+          <a:bodyPr rtlCol="0" anchor="ctr"/>
+          <a:lstStyle/>
+          <a:p>
+            <a:pPr algn="ctr"/>
+          </a:p>
+        </p:txBody>
+      </p:sp>
+      <p:sp>
+        <p:nvSpPr>
+          <p:cNvPr id="3" name="Rectangle 2"/>
+          <p:cNvSpPr/>
+          <p:nvPr/>
+        </p:nvSpPr>
+        <p:spPr>
+          <a:xfrm>
+            <a:off x="0" y="0"/>
             <a:ext cx="12191695" cy="6858000"/>
           </a:xfrm>
           <a:prstGeom prst="rect">
@@ -8563,7 +9020,7 @@
                 </a:solidFill>
                 <a:latin typeface="Calibri"/>
               </a:rPr>
-              <a:t>Four modules — M1 type-I IFN · M2 TGF-β/fibrosis · M3 EndoMT/vasculopathy · M4 IL-6/Th2/B — draining into 6 phenotype endpoints.</a:t>
+              <a:t>Five modules — M1 IFN · M2 TGF-β/fibrosis · M3 EndoMT · M4 cytokines · M5 B-cell/autoreactivity — draining into 6 phenotype endpoints.</a:t>
             </a:r>
           </a:p>
           <a:p>
@@ -10066,7 +10523,7 @@
                 </a:solidFill>
                 <a:latin typeface="Consolas"/>
               </a:rPr>
-              <a:t>M1 IFN 19   M2 fibrosis 58</a:t>
+              <a:t>M1 IFN 19  M2 fibrosis 58  M3 EndoMT 27</a:t>
             </a:r>
           </a:p>
           <a:p>
@@ -10085,7 +10542,7 @@
                 </a:solidFill>
                 <a:latin typeface="Consolas"/>
               </a:rPr>
-              <a:t>M3 EndoMT 27   M4 immune 21   xt 8</a:t>
+              <a:t>M4 cytokine 11  M5 B-cell 10  xt 8</a:t>
             </a:r>
           </a:p>
           <a:p>
